--- a/docs/(완성본)해커톤_팀_활동_기획서_NFC에듀태그.pptx
+++ b/docs/(완성본)해커톤_팀_활동_기획서_NFC에듀태그.pptx
@@ -3554,7 +3554,7 @@
           <a:lstStyle/>
           <a:p>
             <a:pPr algn="ctr">
-              <a:defRPr sz="930">
+              <a:defRPr sz="900">
                 <a:solidFill>
                   <a:srgbClr val="191E24"/>
                 </a:solidFill>
@@ -3568,9 +3568,9 @@
           <a:p>
             <a:pPr>
               <a:spcBef>
-                <a:spcPts val="300"/>
+                <a:spcPts val="200"/>
               </a:spcBef>
-              <a:defRPr sz="930">
+              <a:defRPr sz="900">
                 <a:solidFill>
                   <a:srgbClr val="191E24"/>
                 </a:solidFill>
@@ -3584,9 +3584,9 @@
           <a:p>
             <a:pPr>
               <a:spcBef>
-                <a:spcPts val="300"/>
+                <a:spcPts val="200"/>
               </a:spcBef>
-              <a:defRPr sz="930">
+              <a:defRPr sz="900">
                 <a:solidFill>
                   <a:srgbClr val="191E24"/>
                 </a:solidFill>
@@ -3600,9 +3600,9 @@
           <a:p>
             <a:pPr>
               <a:spcBef>
-                <a:spcPts val="300"/>
+                <a:spcPts val="200"/>
               </a:spcBef>
-              <a:defRPr sz="930">
+              <a:defRPr sz="900">
                 <a:solidFill>
                   <a:srgbClr val="191E24"/>
                 </a:solidFill>
@@ -3616,9 +3616,9 @@
           <a:p>
             <a:pPr>
               <a:spcBef>
-                <a:spcPts val="300"/>
+                <a:spcPts val="200"/>
               </a:spcBef>
-              <a:defRPr sz="930">
+              <a:defRPr sz="900">
                 <a:solidFill>
                   <a:srgbClr val="191E24"/>
                 </a:solidFill>
@@ -3632,9 +3632,9 @@
           <a:p>
             <a:pPr>
               <a:spcBef>
-                <a:spcPts val="300"/>
+                <a:spcPts val="200"/>
               </a:spcBef>
-              <a:defRPr sz="930">
+              <a:defRPr sz="900">
                 <a:solidFill>
                   <a:srgbClr val="191E24"/>
                 </a:solidFill>
@@ -3643,6 +3643,38 @@
             </a:pPr>
             <a:r>
               <a:t>  - 출석부, 독서 통장, 체육(PAPS) 측정, 학급 화폐가 제각각 분리되어 교사의 수업 준비 및 관리 피로도 가중.</a:t>
+            </a:r>
+          </a:p>
+          <a:p>
+            <a:pPr>
+              <a:spcBef>
+                <a:spcPts val="200"/>
+              </a:spcBef>
+              <a:defRPr sz="900">
+                <a:solidFill>
+                  <a:srgbClr val="191E24"/>
+                </a:solidFill>
+                <a:latin typeface="Malgun Gothic"/>
+              </a:defRPr>
+            </a:pPr>
+            <a:r>
+              <a:t>• 교육용 AI의 무비판적 완전 자동화 위험:</a:t>
+            </a:r>
+          </a:p>
+          <a:p>
+            <a:pPr>
+              <a:spcBef>
+                <a:spcPts val="200"/>
+              </a:spcBef>
+              <a:defRPr sz="900">
+                <a:solidFill>
+                  <a:srgbClr val="191E24"/>
+                </a:solidFill>
+                <a:latin typeface="Malgun Gothic"/>
+              </a:defRPr>
+            </a:pPr>
+            <a:r>
+              <a:t>  - AI가 생성한 피드백이 교사의 검토 없이 학생에게 그대로 전달되어, 교사의 주체성과 학생의 비판적 사고가 함께 약화됨.</a:t>
             </a:r>
           </a:p>
         </p:txBody>
@@ -4496,7 +4528,7 @@
           <a:lstStyle/>
           <a:p>
             <a:pPr algn="ctr">
-              <a:defRPr sz="900">
+              <a:defRPr sz="880">
                 <a:solidFill>
                   <a:srgbClr val="191E24"/>
                 </a:solidFill>
@@ -4510,9 +4542,9 @@
           <a:p>
             <a:pPr>
               <a:spcBef>
-                <a:spcPts val="400"/>
+                <a:spcPts val="300"/>
               </a:spcBef>
-              <a:defRPr sz="900">
+              <a:defRPr sz="880">
                 <a:solidFill>
                   <a:srgbClr val="191E24"/>
                 </a:solidFill>
@@ -4526,9 +4558,9 @@
           <a:p>
             <a:pPr>
               <a:spcBef>
-                <a:spcPts val="400"/>
+                <a:spcPts val="300"/>
               </a:spcBef>
-              <a:defRPr sz="900">
+              <a:defRPr sz="880">
                 <a:solidFill>
                   <a:srgbClr val="191E24"/>
                 </a:solidFill>
@@ -4542,9 +4574,9 @@
           <a:p>
             <a:pPr>
               <a:spcBef>
-                <a:spcPts val="400"/>
+                <a:spcPts val="300"/>
               </a:spcBef>
-              <a:defRPr sz="900">
+              <a:defRPr sz="880">
                 <a:solidFill>
                   <a:srgbClr val="191E24"/>
                 </a:solidFill>
@@ -4558,9 +4590,9 @@
           <a:p>
             <a:pPr>
               <a:spcBef>
-                <a:spcPts val="400"/>
+                <a:spcPts val="300"/>
               </a:spcBef>
-              <a:defRPr sz="900">
+              <a:defRPr sz="880">
                 <a:solidFill>
                   <a:srgbClr val="191E24"/>
                 </a:solidFill>
@@ -4574,9 +4606,9 @@
           <a:p>
             <a:pPr>
               <a:spcBef>
-                <a:spcPts val="400"/>
+                <a:spcPts val="300"/>
               </a:spcBef>
-              <a:defRPr sz="900">
+              <a:defRPr sz="880">
                 <a:solidFill>
                   <a:srgbClr val="191E24"/>
                 </a:solidFill>
@@ -4590,9 +4622,9 @@
           <a:p>
             <a:pPr>
               <a:spcBef>
-                <a:spcPts val="400"/>
+                <a:spcPts val="300"/>
               </a:spcBef>
-              <a:defRPr sz="900">
+              <a:defRPr sz="880">
                 <a:solidFill>
                   <a:srgbClr val="191E24"/>
                 </a:solidFill>
@@ -4606,9 +4638,9 @@
           <a:p>
             <a:pPr>
               <a:spcBef>
-                <a:spcPts val="400"/>
+                <a:spcPts val="300"/>
               </a:spcBef>
-              <a:defRPr sz="900">
+              <a:defRPr sz="880">
                 <a:solidFill>
                   <a:srgbClr val="191E24"/>
                 </a:solidFill>
@@ -4622,9 +4654,25 @@
           <a:p>
             <a:pPr>
               <a:spcBef>
-                <a:spcPts val="400"/>
+                <a:spcPts val="300"/>
               </a:spcBef>
-              <a:defRPr sz="900">
+              <a:defRPr sz="880">
+                <a:solidFill>
+                  <a:srgbClr val="191E24"/>
+                </a:solidFill>
+                <a:latin typeface="Malgun Gothic"/>
+              </a:defRPr>
+            </a:pPr>
+            <a:r>
+              <a:t>✔  인간 협업형(HITL) AI 교육 스튜디오 : AI-SPARC 수업 설계기 + 교사 Level 3 검토·승인 센터 + AI 감사 추적 활동지 제작기</a:t>
+            </a:r>
+          </a:p>
+          <a:p>
+            <a:pPr>
+              <a:spcBef>
+                <a:spcPts val="300"/>
+              </a:spcBef>
+              <a:defRPr sz="880">
                 <a:solidFill>
                   <a:srgbClr val="191E24"/>
                 </a:solidFill>
@@ -5955,6 +6003,42 @@
               </a:defRPr>
             </a:pPr>
             <a:r>
+              <a:t>• HITL Level 3 교사 검토</a:t>
+            </a:r>
+          </a:p>
+          <a:p>
+            <a:pPr>
+              <a:defRPr sz="880">
+                <a:solidFill>
+                  <a:srgbClr val="191E24"/>
+                </a:solidFill>
+                <a:latin typeface="Malgun Gothic"/>
+              </a:defRPr>
+            </a:pPr>
+            <a:r>
+              <a:t>  - AI 초안 비판·수정·승인</a:t>
+            </a:r>
+          </a:p>
+          <a:p>
+            <a:pPr>
+              <a:defRPr sz="880">
+                <a:solidFill>
+                  <a:srgbClr val="191E24"/>
+                </a:solidFill>
+                <a:latin typeface="Malgun Gothic"/>
+              </a:defRPr>
+            </a:pPr>
+          </a:p>
+          <a:p>
+            <a:pPr>
+              <a:defRPr sz="880">
+                <a:solidFill>
+                  <a:srgbClr val="191E24"/>
+                </a:solidFill>
+                <a:latin typeface="Malgun Gothic"/>
+              </a:defRPr>
+            </a:pPr>
+            <a:r>
               <a:t>• 실시간 SSE 브로드캐스트</a:t>
             </a:r>
           </a:p>
@@ -6121,6 +6205,65 @@
             </a:pPr>
             <a:r>
               <a:t>  - 교구 대여 &amp; MSDS 표출</a:t>
+            </a:r>
+          </a:p>
+          <a:p>
+            <a:pPr>
+              <a:defRPr sz="880">
+                <a:solidFill>
+                  <a:srgbClr val="191E24"/>
+                </a:solidFill>
+                <a:latin typeface="Malgun Gothic"/>
+              </a:defRPr>
+            </a:pPr>
+          </a:p>
+          <a:p>
+            <a:pPr>
+              <a:defRPr sz="880">
+                <a:solidFill>
+                  <a:srgbClr val="191E24"/>
+                </a:solidFill>
+                <a:latin typeface="Malgun Gothic"/>
+              </a:defRPr>
+            </a:pPr>
+            <a:r>
+              <a:t>  - 교사 승인 피드백만 배포</a:t>
+            </a:r>
+          </a:p>
+          <a:p>
+            <a:pPr>
+              <a:defRPr sz="880">
+                <a:solidFill>
+                  <a:srgbClr val="191E24"/>
+                </a:solidFill>
+                <a:latin typeface="Malgun Gothic"/>
+              </a:defRPr>
+            </a:pPr>
+          </a:p>
+          <a:p>
+            <a:pPr>
+              <a:defRPr sz="880">
+                <a:solidFill>
+                  <a:srgbClr val="191E24"/>
+                </a:solidFill>
+                <a:latin typeface="Malgun Gothic"/>
+              </a:defRPr>
+            </a:pPr>
+            <a:r>
+              <a:t>• AI 감사 추적 활동지 출력</a:t>
+            </a:r>
+          </a:p>
+          <a:p>
+            <a:pPr>
+              <a:defRPr sz="880">
+                <a:solidFill>
+                  <a:srgbClr val="191E24"/>
+                </a:solidFill>
+                <a:latin typeface="Malgun Gothic"/>
+              </a:defRPr>
+            </a:pPr>
+            <a:r>
+              <a:t>  - 탐구→질문→태깅→교정</a:t>
             </a:r>
           </a:p>
           <a:p>
@@ -7316,6 +7459,10 @@
                       </a:r>
                       <a:br/>
                       <a:r>
+                        <a:t>• HITL AI-SPARC 수업 설계안 및 4단계 AI 감사 추적 학생 활동지 집필</a:t>
+                      </a:r>
+                      <a:br/>
+                      <a:r>
                         <a:t>• 과학 교구 및 화학 시약 MSDS 물질안전보건자료 텍스트 DB 정리</a:t>
                       </a:r>
                     </a:p>
@@ -7520,7 +7667,7 @@
           <a:lstStyle/>
           <a:p>
             <a:pPr algn="ctr">
-              <a:defRPr sz="900">
+              <a:defRPr sz="880">
                 <a:solidFill>
                   <a:srgbClr val="191E24"/>
                 </a:solidFill>
@@ -7534,9 +7681,9 @@
           <a:p>
             <a:pPr>
               <a:spcBef>
-                <a:spcPts val="300"/>
+                <a:spcPts val="200"/>
               </a:spcBef>
-              <a:defRPr sz="900">
+              <a:defRPr sz="880">
                 <a:solidFill>
                   <a:srgbClr val="191E24"/>
                 </a:solidFill>
@@ -7550,9 +7697,9 @@
           <a:p>
             <a:pPr>
               <a:spcBef>
-                <a:spcPts val="300"/>
+                <a:spcPts val="200"/>
               </a:spcBef>
-              <a:defRPr sz="900">
+              <a:defRPr sz="880">
                 <a:solidFill>
                   <a:srgbClr val="191E24"/>
                 </a:solidFill>
@@ -7566,9 +7713,9 @@
           <a:p>
             <a:pPr>
               <a:spcBef>
-                <a:spcPts val="300"/>
+                <a:spcPts val="200"/>
               </a:spcBef>
-              <a:defRPr sz="900">
+              <a:defRPr sz="880">
                 <a:solidFill>
                   <a:srgbClr val="191E24"/>
                 </a:solidFill>
@@ -7582,9 +7729,9 @@
           <a:p>
             <a:pPr>
               <a:spcBef>
-                <a:spcPts val="300"/>
+                <a:spcPts val="200"/>
               </a:spcBef>
-              <a:defRPr sz="900">
+              <a:defRPr sz="880">
                 <a:solidFill>
                   <a:srgbClr val="191E24"/>
                 </a:solidFill>
@@ -7593,6 +7740,22 @@
             </a:pPr>
             <a:r>
               <a:t>5. [필수] 교사용 데이터 관리: 모든 활동 기록이 클릭 한 번으로 엑셀(CSV)로 즉시 다운로드되고 전체 백업/복원이 완벽 지원.</a:t>
+            </a:r>
+          </a:p>
+          <a:p>
+            <a:pPr>
+              <a:spcBef>
+                <a:spcPts val="200"/>
+              </a:spcBef>
+              <a:defRPr sz="880">
+                <a:solidFill>
+                  <a:srgbClr val="191E24"/>
+                </a:solidFill>
+                <a:latin typeface="Malgun Gothic"/>
+              </a:defRPr>
+            </a:pPr>
+            <a:r>
+              <a:t>6. [필수] 인간 협업형(HITL) 검증: AI 피드백이 교사의 Level 3 검토·승인을 거친 뒤에만 학생에게 배포되며, AI-SPARC 수업 설계안과 4단계 AI 감사 추적 활동지가 정상 생성.</a:t>
             </a:r>
           </a:p>
         </p:txBody>

--- a/docs/(완성본)해커톤_팀_활동_기획서_NFC에듀태그.pptx
+++ b/docs/(완성본)해커톤_팀_활동_기획서_NFC에듀태그.pptx
@@ -4528,7 +4528,7 @@
           <a:lstStyle/>
           <a:p>
             <a:pPr algn="ctr">
-              <a:defRPr sz="880">
+              <a:defRPr sz="819">
                 <a:solidFill>
                   <a:srgbClr val="191E24"/>
                 </a:solidFill>
@@ -4542,9 +4542,9 @@
           <a:p>
             <a:pPr>
               <a:spcBef>
-                <a:spcPts val="300"/>
+                <a:spcPts val="200"/>
               </a:spcBef>
-              <a:defRPr sz="880">
+              <a:defRPr sz="819">
                 <a:solidFill>
                   <a:srgbClr val="191E24"/>
                 </a:solidFill>
@@ -4558,9 +4558,9 @@
           <a:p>
             <a:pPr>
               <a:spcBef>
-                <a:spcPts val="300"/>
+                <a:spcPts val="200"/>
               </a:spcBef>
-              <a:defRPr sz="880">
+              <a:defRPr sz="819">
                 <a:solidFill>
                   <a:srgbClr val="191E24"/>
                 </a:solidFill>
@@ -4574,9 +4574,9 @@
           <a:p>
             <a:pPr>
               <a:spcBef>
-                <a:spcPts val="300"/>
+                <a:spcPts val="200"/>
               </a:spcBef>
-              <a:defRPr sz="880">
+              <a:defRPr sz="819">
                 <a:solidFill>
                   <a:srgbClr val="191E24"/>
                 </a:solidFill>
@@ -4590,9 +4590,9 @@
           <a:p>
             <a:pPr>
               <a:spcBef>
-                <a:spcPts val="300"/>
+                <a:spcPts val="200"/>
               </a:spcBef>
-              <a:defRPr sz="880">
+              <a:defRPr sz="819">
                 <a:solidFill>
                   <a:srgbClr val="191E24"/>
                 </a:solidFill>
@@ -4606,9 +4606,9 @@
           <a:p>
             <a:pPr>
               <a:spcBef>
-                <a:spcPts val="300"/>
+                <a:spcPts val="200"/>
               </a:spcBef>
-              <a:defRPr sz="880">
+              <a:defRPr sz="819">
                 <a:solidFill>
                   <a:srgbClr val="191E24"/>
                 </a:solidFill>
@@ -4622,9 +4622,9 @@
           <a:p>
             <a:pPr>
               <a:spcBef>
-                <a:spcPts val="300"/>
+                <a:spcPts val="200"/>
               </a:spcBef>
-              <a:defRPr sz="880">
+              <a:defRPr sz="819">
                 <a:solidFill>
                   <a:srgbClr val="191E24"/>
                 </a:solidFill>
@@ -4638,9 +4638,9 @@
           <a:p>
             <a:pPr>
               <a:spcBef>
-                <a:spcPts val="300"/>
+                <a:spcPts val="200"/>
               </a:spcBef>
-              <a:defRPr sz="880">
+              <a:defRPr sz="819">
                 <a:solidFill>
                   <a:srgbClr val="191E24"/>
                 </a:solidFill>
@@ -4654,9 +4654,9 @@
           <a:p>
             <a:pPr>
               <a:spcBef>
-                <a:spcPts val="300"/>
+                <a:spcPts val="200"/>
               </a:spcBef>
-              <a:defRPr sz="880">
+              <a:defRPr sz="819">
                 <a:solidFill>
                   <a:srgbClr val="191E24"/>
                 </a:solidFill>
@@ -4670,9 +4670,25 @@
           <a:p>
             <a:pPr>
               <a:spcBef>
-                <a:spcPts val="300"/>
+                <a:spcPts val="200"/>
               </a:spcBef>
-              <a:defRPr sz="880">
+              <a:defRPr sz="819">
+                <a:solidFill>
+                  <a:srgbClr val="191E24"/>
+                </a:solidFill>
+                <a:latin typeface="Malgun Gothic"/>
+              </a:defRPr>
+            </a:pPr>
+            <a:r>
+              <a:t>✔  🖥️ 바탕화면 달력 연동 : 설정 탭에서 데스크톱 달력 앱 설치 파일(exe) 원클릭 연동 실행</a:t>
+            </a:r>
+          </a:p>
+          <a:p>
+            <a:pPr>
+              <a:spcBef>
+                <a:spcPts val="200"/>
+              </a:spcBef>
+              <a:defRPr sz="819">
                 <a:solidFill>
                   <a:srgbClr val="191E24"/>
                 </a:solidFill>
@@ -5627,17 +5643,17 @@
           </a:p>
           <a:p>
             <a:pPr>
-              <a:defRPr sz="880">
-                <a:solidFill>
-                  <a:srgbClr val="191E24"/>
-                </a:solidFill>
-                <a:latin typeface="Malgun Gothic"/>
-              </a:defRPr>
-            </a:pPr>
-          </a:p>
-          <a:p>
-            <a:pPr>
-              <a:defRPr sz="880">
+              <a:defRPr sz="819">
+                <a:solidFill>
+                  <a:srgbClr val="191E24"/>
+                </a:solidFill>
+                <a:latin typeface="Malgun Gothic"/>
+              </a:defRPr>
+            </a:pPr>
+          </a:p>
+          <a:p>
+            <a:pPr>
+              <a:defRPr sz="819">
                 <a:solidFill>
                   <a:srgbClr val="191E24"/>
                 </a:solidFill>
@@ -5650,7 +5666,7 @@
           </a:p>
           <a:p>
             <a:pPr>
-              <a:defRPr sz="880">
+              <a:defRPr sz="819">
                 <a:solidFill>
                   <a:srgbClr val="191E24"/>
                 </a:solidFill>
@@ -5663,7 +5679,7 @@
           </a:p>
           <a:p>
             <a:pPr>
-              <a:defRPr sz="880">
+              <a:defRPr sz="819">
                 <a:solidFill>
                   <a:srgbClr val="191E24"/>
                 </a:solidFill>
@@ -5676,7 +5692,7 @@
           </a:p>
           <a:p>
             <a:pPr>
-              <a:defRPr sz="880">
+              <a:defRPr sz="819">
                 <a:solidFill>
                   <a:srgbClr val="191E24"/>
                 </a:solidFill>
@@ -5689,7 +5705,7 @@
           </a:p>
           <a:p>
             <a:pPr>
-              <a:defRPr sz="880">
+              <a:defRPr sz="819">
                 <a:solidFill>
                   <a:srgbClr val="191E24"/>
                 </a:solidFill>
@@ -5702,17 +5718,17 @@
           </a:p>
           <a:p>
             <a:pPr>
-              <a:defRPr sz="880">
-                <a:solidFill>
-                  <a:srgbClr val="191E24"/>
-                </a:solidFill>
-                <a:latin typeface="Malgun Gothic"/>
-              </a:defRPr>
-            </a:pPr>
-          </a:p>
-          <a:p>
-            <a:pPr>
-              <a:defRPr sz="880">
+              <a:defRPr sz="819">
+                <a:solidFill>
+                  <a:srgbClr val="191E24"/>
+                </a:solidFill>
+                <a:latin typeface="Malgun Gothic"/>
+              </a:defRPr>
+            </a:pPr>
+          </a:p>
+          <a:p>
+            <a:pPr>
+              <a:defRPr sz="819">
                 <a:solidFill>
                   <a:srgbClr val="191E24"/>
                 </a:solidFill>
@@ -5725,7 +5741,7 @@
           </a:p>
           <a:p>
             <a:pPr>
-              <a:defRPr sz="880">
+              <a:defRPr sz="819">
                 <a:solidFill>
                   <a:srgbClr val="191E24"/>
                 </a:solidFill>
@@ -5738,17 +5754,17 @@
           </a:p>
           <a:p>
             <a:pPr>
-              <a:defRPr sz="880">
-                <a:solidFill>
-                  <a:srgbClr val="191E24"/>
-                </a:solidFill>
-                <a:latin typeface="Malgun Gothic"/>
-              </a:defRPr>
-            </a:pPr>
-          </a:p>
-          <a:p>
-            <a:pPr>
-              <a:defRPr sz="880">
+              <a:defRPr sz="819">
+                <a:solidFill>
+                  <a:srgbClr val="191E24"/>
+                </a:solidFill>
+                <a:latin typeface="Malgun Gothic"/>
+              </a:defRPr>
+            </a:pPr>
+          </a:p>
+          <a:p>
+            <a:pPr>
+              <a:defRPr sz="819">
                 <a:solidFill>
                   <a:srgbClr val="191E24"/>
                 </a:solidFill>
@@ -5761,7 +5777,7 @@
           </a:p>
           <a:p>
             <a:pPr>
-              <a:defRPr sz="880">
+              <a:defRPr sz="819">
                 <a:solidFill>
                   <a:srgbClr val="191E24"/>
                 </a:solidFill>
@@ -5770,6 +5786,29 @@
             </a:pPr>
             <a:r>
               <a:t>  - 온실 순찰 / 자율주행</a:t>
+            </a:r>
+          </a:p>
+          <a:p>
+            <a:pPr>
+              <a:defRPr sz="819">
+                <a:solidFill>
+                  <a:srgbClr val="191E24"/>
+                </a:solidFill>
+                <a:latin typeface="Malgun Gothic"/>
+              </a:defRPr>
+            </a:pPr>
+          </a:p>
+          <a:p>
+            <a:pPr>
+              <a:defRPr sz="819">
+                <a:solidFill>
+                  <a:srgbClr val="191E24"/>
+                </a:solidFill>
+                <a:latin typeface="Malgun Gothic"/>
+              </a:defRPr>
+            </a:pPr>
+            <a:r>
+              <a:t>• 바탕화면 달력 실행 클릭</a:t>
             </a:r>
           </a:p>
         </p:txBody>
@@ -5864,17 +5903,17 @@
           </a:p>
           <a:p>
             <a:pPr>
-              <a:defRPr sz="880">
-                <a:solidFill>
-                  <a:srgbClr val="191E24"/>
-                </a:solidFill>
-                <a:latin typeface="Malgun Gothic"/>
-              </a:defRPr>
-            </a:pPr>
-          </a:p>
-          <a:p>
-            <a:pPr>
-              <a:defRPr sz="880">
+              <a:defRPr sz="819">
+                <a:solidFill>
+                  <a:srgbClr val="191E24"/>
+                </a:solidFill>
+                <a:latin typeface="Malgun Gothic"/>
+              </a:defRPr>
+            </a:pPr>
+          </a:p>
+          <a:p>
+            <a:pPr>
+              <a:defRPr sz="819">
                 <a:solidFill>
                   <a:srgbClr val="191E24"/>
                 </a:solidFill>
@@ -5887,7 +5926,7 @@
           </a:p>
           <a:p>
             <a:pPr>
-              <a:defRPr sz="880">
+              <a:defRPr sz="819">
                 <a:solidFill>
                   <a:srgbClr val="191E24"/>
                 </a:solidFill>
@@ -5900,17 +5939,17 @@
           </a:p>
           <a:p>
             <a:pPr>
-              <a:defRPr sz="880">
-                <a:solidFill>
-                  <a:srgbClr val="191E24"/>
-                </a:solidFill>
-                <a:latin typeface="Malgun Gothic"/>
-              </a:defRPr>
-            </a:pPr>
-          </a:p>
-          <a:p>
-            <a:pPr>
-              <a:defRPr sz="880">
+              <a:defRPr sz="819">
+                <a:solidFill>
+                  <a:srgbClr val="191E24"/>
+                </a:solidFill>
+                <a:latin typeface="Malgun Gothic"/>
+              </a:defRPr>
+            </a:pPr>
+          </a:p>
+          <a:p>
+            <a:pPr>
+              <a:defRPr sz="819">
                 <a:solidFill>
                   <a:srgbClr val="191E24"/>
                 </a:solidFill>
@@ -5923,7 +5962,7 @@
           </a:p>
           <a:p>
             <a:pPr>
-              <a:defRPr sz="880">
+              <a:defRPr sz="819">
                 <a:solidFill>
                   <a:srgbClr val="191E24"/>
                 </a:solidFill>
@@ -5936,17 +5975,17 @@
           </a:p>
           <a:p>
             <a:pPr>
-              <a:defRPr sz="880">
-                <a:solidFill>
-                  <a:srgbClr val="191E24"/>
-                </a:solidFill>
-                <a:latin typeface="Malgun Gothic"/>
-              </a:defRPr>
-            </a:pPr>
-          </a:p>
-          <a:p>
-            <a:pPr>
-              <a:defRPr sz="880">
+              <a:defRPr sz="819">
+                <a:solidFill>
+                  <a:srgbClr val="191E24"/>
+                </a:solidFill>
+                <a:latin typeface="Malgun Gothic"/>
+              </a:defRPr>
+            </a:pPr>
+          </a:p>
+          <a:p>
+            <a:pPr>
+              <a:defRPr sz="819">
                 <a:solidFill>
                   <a:srgbClr val="191E24"/>
                 </a:solidFill>
@@ -5959,7 +5998,7 @@
           </a:p>
           <a:p>
             <a:pPr>
-              <a:defRPr sz="880">
+              <a:defRPr sz="819">
                 <a:solidFill>
                   <a:srgbClr val="191E24"/>
                 </a:solidFill>
@@ -5972,7 +6011,7 @@
           </a:p>
           <a:p>
             <a:pPr>
-              <a:defRPr sz="880">
+              <a:defRPr sz="819">
                 <a:solidFill>
                   <a:srgbClr val="191E24"/>
                 </a:solidFill>
@@ -5985,17 +6024,17 @@
           </a:p>
           <a:p>
             <a:pPr>
-              <a:defRPr sz="880">
-                <a:solidFill>
-                  <a:srgbClr val="191E24"/>
-                </a:solidFill>
-                <a:latin typeface="Malgun Gothic"/>
-              </a:defRPr>
-            </a:pPr>
-          </a:p>
-          <a:p>
-            <a:pPr>
-              <a:defRPr sz="880">
+              <a:defRPr sz="819">
+                <a:solidFill>
+                  <a:srgbClr val="191E24"/>
+                </a:solidFill>
+                <a:latin typeface="Malgun Gothic"/>
+              </a:defRPr>
+            </a:pPr>
+          </a:p>
+          <a:p>
+            <a:pPr>
+              <a:defRPr sz="819">
                 <a:solidFill>
                   <a:srgbClr val="191E24"/>
                 </a:solidFill>
@@ -6008,7 +6047,7 @@
           </a:p>
           <a:p>
             <a:pPr>
-              <a:defRPr sz="880">
+              <a:defRPr sz="819">
                 <a:solidFill>
                   <a:srgbClr val="191E24"/>
                 </a:solidFill>
@@ -6021,17 +6060,17 @@
           </a:p>
           <a:p>
             <a:pPr>
-              <a:defRPr sz="880">
-                <a:solidFill>
-                  <a:srgbClr val="191E24"/>
-                </a:solidFill>
-                <a:latin typeface="Malgun Gothic"/>
-              </a:defRPr>
-            </a:pPr>
-          </a:p>
-          <a:p>
-            <a:pPr>
-              <a:defRPr sz="880">
+              <a:defRPr sz="819">
+                <a:solidFill>
+                  <a:srgbClr val="191E24"/>
+                </a:solidFill>
+                <a:latin typeface="Malgun Gothic"/>
+              </a:defRPr>
+            </a:pPr>
+          </a:p>
+          <a:p>
+            <a:pPr>
+              <a:defRPr sz="819">
                 <a:solidFill>
                   <a:srgbClr val="191E24"/>
                 </a:solidFill>
@@ -6040,6 +6079,29 @@
             </a:pPr>
             <a:r>
               <a:t>• 실시간 SSE 브로드캐스트</a:t>
+            </a:r>
+          </a:p>
+          <a:p>
+            <a:pPr>
+              <a:defRPr sz="819">
+                <a:solidFill>
+                  <a:srgbClr val="191E24"/>
+                </a:solidFill>
+                <a:latin typeface="Malgun Gothic"/>
+              </a:defRPr>
+            </a:pPr>
+          </a:p>
+          <a:p>
+            <a:pPr>
+              <a:defRPr sz="819">
+                <a:solidFill>
+                  <a:srgbClr val="191E24"/>
+                </a:solidFill>
+                <a:latin typeface="Malgun Gothic"/>
+              </a:defRPr>
+            </a:pPr>
+            <a:r>
+              <a:t>• 달력 exe spawn 프로세스 구동</a:t>
             </a:r>
           </a:p>
         </p:txBody>
@@ -6134,17 +6196,17 @@
           </a:p>
           <a:p>
             <a:pPr>
-              <a:defRPr sz="880">
-                <a:solidFill>
-                  <a:srgbClr val="191E24"/>
-                </a:solidFill>
-                <a:latin typeface="Malgun Gothic"/>
-              </a:defRPr>
-            </a:pPr>
-          </a:p>
-          <a:p>
-            <a:pPr>
-              <a:defRPr sz="880">
+              <a:defRPr sz="819">
+                <a:solidFill>
+                  <a:srgbClr val="191E24"/>
+                </a:solidFill>
+                <a:latin typeface="Malgun Gothic"/>
+              </a:defRPr>
+            </a:pPr>
+          </a:p>
+          <a:p>
+            <a:pPr>
+              <a:defRPr sz="819">
                 <a:solidFill>
                   <a:srgbClr val="191E24"/>
                 </a:solidFill>
@@ -6157,7 +6219,7 @@
           </a:p>
           <a:p>
             <a:pPr>
-              <a:defRPr sz="880">
+              <a:defRPr sz="819">
                 <a:solidFill>
                   <a:srgbClr val="191E24"/>
                 </a:solidFill>
@@ -6170,7 +6232,7 @@
           </a:p>
           <a:p>
             <a:pPr>
-              <a:defRPr sz="880">
+              <a:defRPr sz="819">
                 <a:solidFill>
                   <a:srgbClr val="191E24"/>
                 </a:solidFill>
@@ -6183,7 +6245,7 @@
           </a:p>
           <a:p>
             <a:pPr>
-              <a:defRPr sz="880">
+              <a:defRPr sz="819">
                 <a:solidFill>
                   <a:srgbClr val="191E24"/>
                 </a:solidFill>
@@ -6196,7 +6258,7 @@
           </a:p>
           <a:p>
             <a:pPr>
-              <a:defRPr sz="880">
+              <a:defRPr sz="819">
                 <a:solidFill>
                   <a:srgbClr val="191E24"/>
                 </a:solidFill>
@@ -6209,17 +6271,17 @@
           </a:p>
           <a:p>
             <a:pPr>
-              <a:defRPr sz="880">
-                <a:solidFill>
-                  <a:srgbClr val="191E24"/>
-                </a:solidFill>
-                <a:latin typeface="Malgun Gothic"/>
-              </a:defRPr>
-            </a:pPr>
-          </a:p>
-          <a:p>
-            <a:pPr>
-              <a:defRPr sz="880">
+              <a:defRPr sz="819">
+                <a:solidFill>
+                  <a:srgbClr val="191E24"/>
+                </a:solidFill>
+                <a:latin typeface="Malgun Gothic"/>
+              </a:defRPr>
+            </a:pPr>
+          </a:p>
+          <a:p>
+            <a:pPr>
+              <a:defRPr sz="819">
                 <a:solidFill>
                   <a:srgbClr val="191E24"/>
                 </a:solidFill>
@@ -6232,17 +6294,17 @@
           </a:p>
           <a:p>
             <a:pPr>
-              <a:defRPr sz="880">
-                <a:solidFill>
-                  <a:srgbClr val="191E24"/>
-                </a:solidFill>
-                <a:latin typeface="Malgun Gothic"/>
-              </a:defRPr>
-            </a:pPr>
-          </a:p>
-          <a:p>
-            <a:pPr>
-              <a:defRPr sz="880">
+              <a:defRPr sz="819">
+                <a:solidFill>
+                  <a:srgbClr val="191E24"/>
+                </a:solidFill>
+                <a:latin typeface="Malgun Gothic"/>
+              </a:defRPr>
+            </a:pPr>
+          </a:p>
+          <a:p>
+            <a:pPr>
+              <a:defRPr sz="819">
                 <a:solidFill>
                   <a:srgbClr val="191E24"/>
                 </a:solidFill>
@@ -6255,7 +6317,7 @@
           </a:p>
           <a:p>
             <a:pPr>
-              <a:defRPr sz="880">
+              <a:defRPr sz="819">
                 <a:solidFill>
                   <a:srgbClr val="191E24"/>
                 </a:solidFill>
@@ -6268,17 +6330,17 @@
           </a:p>
           <a:p>
             <a:pPr>
-              <a:defRPr sz="880">
-                <a:solidFill>
-                  <a:srgbClr val="191E24"/>
-                </a:solidFill>
-                <a:latin typeface="Malgun Gothic"/>
-              </a:defRPr>
-            </a:pPr>
-          </a:p>
-          <a:p>
-            <a:pPr>
-              <a:defRPr sz="880">
+              <a:defRPr sz="819">
+                <a:solidFill>
+                  <a:srgbClr val="191E24"/>
+                </a:solidFill>
+                <a:latin typeface="Malgun Gothic"/>
+              </a:defRPr>
+            </a:pPr>
+          </a:p>
+          <a:p>
+            <a:pPr>
+              <a:defRPr sz="819">
                 <a:solidFill>
                   <a:srgbClr val="191E24"/>
                 </a:solidFill>
@@ -6291,7 +6353,7 @@
           </a:p>
           <a:p>
             <a:pPr>
-              <a:defRPr sz="880">
+              <a:defRPr sz="819">
                 <a:solidFill>
                   <a:srgbClr val="191E24"/>
                 </a:solidFill>
@@ -6304,7 +6366,7 @@
           </a:p>
           <a:p>
             <a:pPr>
-              <a:defRPr sz="880">
+              <a:defRPr sz="819">
                 <a:solidFill>
                   <a:srgbClr val="191E24"/>
                 </a:solidFill>
@@ -6313,6 +6375,29 @@
             </a:pPr>
             <a:r>
               <a:t>  - 100% 로컬 데이터 보존</a:t>
+            </a:r>
+          </a:p>
+          <a:p>
+            <a:pPr>
+              <a:defRPr sz="819">
+                <a:solidFill>
+                  <a:srgbClr val="191E24"/>
+                </a:solidFill>
+                <a:latin typeface="Malgun Gothic"/>
+              </a:defRPr>
+            </a:pPr>
+          </a:p>
+          <a:p>
+            <a:pPr>
+              <a:defRPr sz="819">
+                <a:solidFill>
+                  <a:srgbClr val="191E24"/>
+                </a:solidFill>
+                <a:latin typeface="Malgun Gothic"/>
+              </a:defRPr>
+            </a:pPr>
+            <a:r>
+              <a:t>• 바탕화면 달력 연동화면 표출</a:t>
             </a:r>
           </a:p>
         </p:txBody>
@@ -7634,7 +7719,7 @@
         <p:spPr>
           <a:xfrm>
             <a:off x="594360" y="7159752"/>
-            <a:ext cx="6373368" cy="2834640"/>
+            <a:ext cx="6373368" cy="2971800"/>
           </a:xfrm>
           <a:prstGeom prst="roundRect">
             <a:avLst/>
@@ -7667,7 +7752,7 @@
           <a:lstStyle/>
           <a:p>
             <a:pPr algn="ctr">
-              <a:defRPr sz="880">
+              <a:defRPr sz="819">
                 <a:solidFill>
                   <a:srgbClr val="191E24"/>
                 </a:solidFill>
@@ -7681,9 +7766,9 @@
           <a:p>
             <a:pPr>
               <a:spcBef>
-                <a:spcPts val="200"/>
+                <a:spcPts val="150"/>
               </a:spcBef>
-              <a:defRPr sz="880">
+              <a:defRPr sz="819">
                 <a:solidFill>
                   <a:srgbClr val="191E24"/>
                 </a:solidFill>
@@ -7697,9 +7782,9 @@
           <a:p>
             <a:pPr>
               <a:spcBef>
-                <a:spcPts val="200"/>
+                <a:spcPts val="150"/>
               </a:spcBef>
-              <a:defRPr sz="880">
+              <a:defRPr sz="819">
                 <a:solidFill>
                   <a:srgbClr val="191E24"/>
                 </a:solidFill>
@@ -7713,9 +7798,9 @@
           <a:p>
             <a:pPr>
               <a:spcBef>
-                <a:spcPts val="200"/>
+                <a:spcPts val="150"/>
               </a:spcBef>
-              <a:defRPr sz="880">
+              <a:defRPr sz="819">
                 <a:solidFill>
                   <a:srgbClr val="191E24"/>
                 </a:solidFill>
@@ -7729,9 +7814,9 @@
           <a:p>
             <a:pPr>
               <a:spcBef>
-                <a:spcPts val="200"/>
+                <a:spcPts val="150"/>
               </a:spcBef>
-              <a:defRPr sz="880">
+              <a:defRPr sz="819">
                 <a:solidFill>
                   <a:srgbClr val="191E24"/>
                 </a:solidFill>
@@ -7745,9 +7830,9 @@
           <a:p>
             <a:pPr>
               <a:spcBef>
-                <a:spcPts val="200"/>
+                <a:spcPts val="150"/>
               </a:spcBef>
-              <a:defRPr sz="880">
+              <a:defRPr sz="819">
                 <a:solidFill>
                   <a:srgbClr val="191E24"/>
                 </a:solidFill>
@@ -7756,6 +7841,22 @@
             </a:pPr>
             <a:r>
               <a:t>6. [필수] 인간 협업형(HITL) 검증: AI 피드백이 교사의 Level 3 검토·승인을 거친 뒤에만 학생에게 배포되며, AI-SPARC 수업 설계안과 4단계 AI 감사 추적 활동지가 정상 생성.</a:t>
+            </a:r>
+          </a:p>
+          <a:p>
+            <a:pPr>
+              <a:spcBef>
+                <a:spcPts val="150"/>
+              </a:spcBef>
+              <a:defRPr sz="819">
+                <a:solidFill>
+                  <a:srgbClr val="191E24"/>
+                </a:solidFill>
+                <a:latin typeface="Malgun Gothic"/>
+              </a:defRPr>
+            </a:pPr>
+            <a:r>
+              <a:t>7. [선택] 바탕화면 달력 연동: 데스크톱 달력 설치 파일(exe) 경로 설정 시 원클릭 프로세스 실행 기능 정상 작동.</a:t>
             </a:r>
           </a:p>
         </p:txBody>
